--- a/docs/deck.pptx
+++ b/docs/deck.pptx
@@ -2134,7 +2134,7 @@
                 <a:ea typeface="Cambria" pitchFamily="34" charset="-122"/>
                 <a:cs typeface="Cambria" pitchFamily="34" charset="-120"/>
               </a:rPr>
-              <a:t>What's proven, what's a placeholder</a:t>
+              <a:t>What's proven, what's assumed</a:t>
             </a:r>
             <a:endParaRPr lang="en-US" sz="3200" dirty="0"/>
           </a:p>
@@ -2406,7 +2406,7 @@
                 <a:ea typeface="Calibri" pitchFamily="34" charset="-122"/>
                 <a:cs typeface="Calibri" pitchFamily="34" charset="-120"/>
               </a:rPr>
-              <a:t>30 automated tests, hand-derived where possible -- not just checked against the code's own output</a:t>
+              <a:t>Automated tests, hand-derived where possible -- not just checked against the code's own output</a:t>
             </a:r>
             <a:endParaRPr lang="en-US" sz="1300" dirty="0"/>
           </a:p>
@@ -2467,7 +2467,7 @@
                 <a:ea typeface="Cambria" pitchFamily="34" charset="-122"/>
                 <a:cs typeface="Cambria" pitchFamily="34" charset="-120"/>
               </a:rPr>
-              <a:t>PLACEHOLDER</a:t>
+              <a:t>ASSUMED</a:t>
             </a:r>
             <a:endParaRPr lang="en-US" sz="1600" dirty="0"/>
           </a:p>
@@ -2510,7 +2510,7 @@
                 <a:ea typeface="Calibri" pitchFamily="34" charset="-122"/>
                 <a:cs typeface="Calibri" pitchFamily="34" charset="-120"/>
               </a:rPr>
-              <a:t>How opponents actually tend to wager and answer -- a labeled guess, not fitted to real data yet</a:t>
+              <a:t>How rivals bet -- based on IBM's study of real games; some weights published, the rest labeled assumptions</a:t>
             </a:r>
             <a:endParaRPr lang="en-US" sz="1300" dirty="0"/>
           </a:p>
@@ -2596,7 +2596,7 @@
                 <a:ea typeface="Calibri" pitchFamily="34" charset="-122"/>
                 <a:cs typeface="Calibri" pitchFamily="34" charset="-120"/>
               </a:rPr>
-              <a:t>The JavaScript app's parity with the Python engine -- checked by hand, not by automated CI yet</a:t>
+              <a:t>The browser app is a hand-written copy of the engine -- compared against it by an automated script</a:t>
             </a:r>
             <a:endParaRPr lang="en-US" sz="1300" dirty="0"/>
           </a:p>
@@ -3371,15 +3371,9 @@
                 <a:latin typeface="Cambria" pitchFamily="34" charset="0"/>
                 <a:ea typeface="Cambria" pitchFamily="34" charset="-122"/>
                 <a:cs typeface="Cambria" pitchFamily="34" charset="-120"/>
-                <a:hlinkClick r:id="rId1" invalidUrl="" action="" tgtFrame="" tooltip="" history="1" highlightClick="0" endSnd="0">
-                  <a:extLst>
-                    <a:ext uri="{A12FA001-AC4F-418D-AE19-62706E023703}">
-                      <ahyp:hlinkClr xmlns:ahyp="http://schemas.microsoft.com/office/drawing/2018/hyperlinkcolor" val="tx"/>
-                    </a:ext>
-                  </a:extLst>
-                </a:hlinkClick>
-              </a:rPr>
-              <a:t>docs/white-paper.md</a:t>
+                <a:hlinkClick r:id="rId1"/>
+              </a:rPr>
+              <a:t>Read the white paper</a:t>
             </a:r>
             <a:endParaRPr lang="en-US" sz="2000" dirty="0"/>
           </a:p>
@@ -3417,8 +3411,9 @@
                 <a:latin typeface="Calibri" pitchFamily="34" charset="0"/>
                 <a:ea typeface="Calibri" pitchFamily="34" charset="-122"/>
                 <a:cs typeface="Calibri" pitchFamily="34" charset="-120"/>
-              </a:rPr>
-              <a:t>Also see: docs/tutorial/, docs/how-to/, docs/reference/, and docs/explanation/ for task-by-task guides</a:t>
+                <a:hlinkClick r:id="rId1"/>
+              </a:rPr>
+              <a:t>github.com/willhoop/jeopardy-wagering/blob/main/docs/white-paper.md</a:t>
             </a:r>
             <a:endParaRPr lang="en-US" sz="1200" dirty="0"/>
           </a:p>
@@ -4400,7 +4395,7 @@
                 <a:ea typeface="Calibri" pitchFamily="34" charset="-122"/>
                 <a:cs typeface="Calibri" pitchFamily="34" charset="-120"/>
               </a:rPr>
-              <a:t>A probability-weighted decision. Uses your confidence and a model of how opponents tend to play.</a:t>
+              <a:t>A probability-weighted decision. Uses your confidence and simulated rivals based on real games.</a:t>
             </a:r>
             <a:endParaRPr lang="en-US" sz="1400" dirty="0"/>
           </a:p>
@@ -5140,7 +5135,7 @@
                 <a:ea typeface="Cambria" pitchFamily="34" charset="-122"/>
                 <a:cs typeface="Cambria" pitchFamily="34" charset="-120"/>
               </a:rPr>
-              <a:t>Smart Bet: using your confidence</a:t>
+              <a:t>Smart Bet: a tie is not a win</a:t>
             </a:r>
             <a:endParaRPr lang="en-US" sz="3200" dirty="0"/>
           </a:p>
@@ -5179,7 +5174,7 @@
                 <a:ea typeface="Calibri" pitchFamily="34" charset="-122"/>
                 <a:cs typeface="Calibri" pitchFamily="34" charset="-120"/>
               </a:rPr>
-              <a:t>Same scores. Smart Bet also counts a tie for first as a win -- matching the real show rule that co-champions both advance.</a:t>
+              <a:t>Example: you lead with $10,000. Your rivals have $8,000 and $3,400. You are 89% sure of your answer.</a:t>
             </a:r>
             <a:endParaRPr lang="en-US" sz="1400" dirty="0"/>
           </a:p>
@@ -5240,7 +5235,7 @@
                 <a:ea typeface="Calibri" pitchFamily="34" charset="-122"/>
                 <a:cs typeface="Calibri" pitchFamily="34" charset="-120"/>
               </a:rPr>
-              <a:t>AT 50% CONFIDENCE</a:t>
+              <a:t>BEFORE: A TIE COUNTED AS A WIN</a:t>
             </a:r>
             <a:endParaRPr lang="en-US" sz="1300" dirty="0"/>
           </a:p>
@@ -5279,7 +5274,7 @@
                 <a:ea typeface="Cambria" pitchFamily="34" charset="-122"/>
                 <a:cs typeface="Cambria" pitchFamily="34" charset="-120"/>
               </a:rPr>
-              <a:t>$4,000</a:t>
+              <a:t>$6,000</a:t>
             </a:r>
             <a:endParaRPr lang="en-US" sz="4400" dirty="0"/>
           </a:p>
@@ -5318,7 +5313,7 @@
                 <a:ea typeface="Calibri" pitchFamily="34" charset="-122"/>
                 <a:cs typeface="Calibri" pitchFamily="34" charset="-120"/>
               </a:rPr>
-              <a:t>~78% estimated win rate</a:t>
+              <a:t>old Smart Bet: a bet to tie</a:t>
             </a:r>
             <a:endParaRPr lang="en-US" sz="1400" dirty="0"/>
           </a:p>
@@ -5360,7 +5355,7 @@
                 <a:ea typeface="Calibri" pitchFamily="34" charset="-122"/>
                 <a:cs typeface="Calibri" pitchFamily="34" charset="-120"/>
               </a:rPr>
-              <a:t>recommended wager stays the same --</a:t>
+              <a:t>If you and second place both double up,</a:t>
             </a:r>
             <a:endParaRPr lang="en-US" sz="1150" dirty="0"/>
           </a:p>
@@ -5380,7 +5375,7 @@
                 <a:ea typeface="Calibri" pitchFamily="34" charset="-122"/>
                 <a:cs typeface="Calibri" pitchFamily="34" charset="-120"/>
               </a:rPr>
-              <a:t>confidence changes how good the bet is,</a:t>
+              <a:t>you finish level. The old tool used the</a:t>
             </a:r>
             <a:endParaRPr lang="en-US" sz="1150" dirty="0"/>
           </a:p>
@@ -5400,7 +5395,7 @@
                 <a:ea typeface="Calibri" pitchFamily="34" charset="-122"/>
                 <a:cs typeface="Calibri" pitchFamily="34" charset="-120"/>
               </a:rPr>
-              <a:t>not how much to bet here</a:t>
+              <a:t>old co-champion rule and called it a win.</a:t>
             </a:r>
             <a:endParaRPr lang="en-US" sz="1150" dirty="0"/>
           </a:p>
@@ -5461,7 +5456,7 @@
                 <a:ea typeface="Calibri" pitchFamily="34" charset="-122"/>
                 <a:cs typeface="Calibri" pitchFamily="34" charset="-120"/>
               </a:rPr>
-              <a:t>AT 90% CONFIDENCE</a:t>
+              <a:t>NOW: A TIE IS HALF A WIN</a:t>
             </a:r>
             <a:endParaRPr lang="en-US" sz="1300" dirty="0"/>
           </a:p>
@@ -5500,7 +5495,7 @@
                 <a:ea typeface="Cambria" pitchFamily="34" charset="-122"/>
                 <a:cs typeface="Cambria" pitchFamily="34" charset="-120"/>
               </a:rPr>
-              <a:t>$4,000</a:t>
+              <a:t>$6,001</a:t>
             </a:r>
             <a:endParaRPr lang="en-US" sz="4400" dirty="0"/>
           </a:p>
@@ -5539,7 +5534,7 @@
                 <a:ea typeface="Calibri" pitchFamily="34" charset="-122"/>
                 <a:cs typeface="Calibri" pitchFamily="34" charset="-120"/>
               </a:rPr>
-              <a:t>~96% estimated win rate</a:t>
+              <a:t>new Smart Bet: one dollar more wins</a:t>
             </a:r>
             <a:endParaRPr lang="en-US" sz="1400" dirty="0"/>
           </a:p>
@@ -5581,7 +5576,7 @@
                 <a:ea typeface="Calibri" pitchFamily="34" charset="-122"/>
                 <a:cs typeface="Calibri" pitchFamily="34" charset="-120"/>
               </a:rPr>
-              <a:t>recommended wager stays the same --</a:t>
+              <a:t>Since November 2014, a tie for first goes</a:t>
             </a:r>
             <a:endParaRPr lang="en-US" sz="1150" dirty="0"/>
           </a:p>
@@ -5601,7 +5596,7 @@
                 <a:ea typeface="Calibri" pitchFamily="34" charset="-122"/>
                 <a:cs typeface="Calibri" pitchFamily="34" charset="-120"/>
               </a:rPr>
-              <a:t>confidence changes how good the bet is,</a:t>
+              <a:t>to a tiebreaker clue, and only one player</a:t>
             </a:r>
             <a:endParaRPr lang="en-US" sz="1150" dirty="0"/>
           </a:p>
@@ -5621,7 +5616,7 @@
                 <a:ea typeface="Calibri" pitchFamily="34" charset="-122"/>
                 <a:cs typeface="Calibri" pitchFamily="34" charset="-120"/>
               </a:rPr>
-              <a:t>not how much to bet here</a:t>
+              <a:t>comes back. The tool now follows that rule.</a:t>
             </a:r>
             <a:endParaRPr lang="en-US" sz="1150" dirty="0"/>
           </a:p>
@@ -5682,7 +5677,7 @@
                 <a:ea typeface="Cambria" pitchFamily="34" charset="-122"/>
                 <a:cs typeface="Cambria" pitchFamily="34" charset="-120"/>
               </a:rPr>
-              <a:t>A rule worth knowing: never settle for a tie when a win is free.</a:t>
+              <a:t>A rule worth knowing: never settle for a tie when one more dollar wins.</a:t>
             </a:r>
             <a:endParaRPr lang="en-US" sz="1500" dirty="0"/>
           </a:p>
@@ -5724,7 +5719,7 @@
                 <a:ea typeface="Calibri" pitchFamily="34" charset="-122"/>
                 <a:cs typeface="Calibri" pitchFamily="34" charset="-120"/>
               </a:rPr>
-              <a:t>If two wagers reach the same win probability, but one only ties an opponent while the other beats them outright at no extra cost, Smart Bet now always prefers the outright win.</a:t>
+              <a:t>A two-way tie for first now counts as half a win, and a three-way tie as a third. Nobody wins at $0.</a:t>
             </a:r>
             <a:endParaRPr lang="en-US" sz="1250" dirty="0"/>
           </a:p>
@@ -6912,7 +6907,7 @@
                 <a:ea typeface="Calibri" pitchFamily="34" charset="-122"/>
                 <a:cs typeface="Calibri" pitchFamily="34" charset="-120"/>
               </a:rPr>
-              <a:t>AFTER THE FIX -- both confidence levels</a:t>
+              <a:t>AFTER THE FIX -- both confidence levels agree</a:t>
             </a:r>
             <a:endParaRPr lang="en-US" sz="1200" dirty="0"/>
           </a:p>
@@ -6951,7 +6946,7 @@
                 <a:ea typeface="Cambria" pitchFamily="34" charset="-122"/>
                 <a:cs typeface="Cambria" pitchFamily="34" charset="-120"/>
               </a:rPr>
-              <a:t>$0</a:t>
+              <a:t>One answer</a:t>
             </a:r>
             <a:endParaRPr lang="en-US" sz="4600" dirty="0"/>
           </a:p>
@@ -7100,7 +7095,7 @@
                 <a:ea typeface="Cambria" pitchFamily="34" charset="-122"/>
                 <a:cs typeface="Cambria" pitchFamily="34" charset="-120"/>
               </a:rPr>
-              <a:t>Even long shots get modeled correctly</a:t>
+              <a:t>Rivals that bet like real people</a:t>
             </a:r>
             <a:endParaRPr lang="en-US" sz="3200" dirty="0"/>
           </a:p>
@@ -7139,7 +7134,7 @@
                 <a:ea typeface="Calibri" pitchFamily="34" charset="-122"/>
                 <a:cs typeface="Calibri" pitchFamily="34" charset="-120"/>
               </a:rPr>
-              <a:t>You're in 3rd place. Can you still win Final Jeopardy if both leaders bet big and miss?</a:t>
+              <a:t>Smart Bet used to guess rivals' bets with an even split. Now it simulates contestants based on IBM's study of about 3,000 real games.</a:t>
             </a:r>
             <a:endParaRPr lang="en-US" sz="1400" dirty="0"/>
           </a:p>
@@ -7200,7 +7195,7 @@
                 <a:ea typeface="Calibri" pitchFamily="34" charset="-122"/>
                 <a:cs typeface="Calibri" pitchFamily="34" charset="-120"/>
               </a:rPr>
-              <a:t>You</a:t>
+              <a:t>Leader</a:t>
             </a:r>
             <a:endParaRPr lang="en-US" sz="1200" dirty="0"/>
           </a:p>
@@ -7239,7 +7234,7 @@
                 <a:ea typeface="Cambria" pitchFamily="34" charset="-122"/>
                 <a:cs typeface="Cambria" pitchFamily="34" charset="-120"/>
               </a:rPr>
-              <a:t>$4,000</a:t>
+              <a:t>Covers</a:t>
             </a:r>
             <a:endParaRPr lang="en-US" sz="2400" dirty="0"/>
           </a:p>
@@ -7300,7 +7295,7 @@
                 <a:ea typeface="Calibri" pitchFamily="34" charset="-122"/>
                 <a:cs typeface="Calibri" pitchFamily="34" charset="-120"/>
               </a:rPr>
-              <a:t>Rival 1</a:t>
+              <a:t>Second place</a:t>
             </a:r>
             <a:endParaRPr lang="en-US" sz="1200" dirty="0"/>
           </a:p>
@@ -7339,7 +7334,7 @@
                 <a:ea typeface="Cambria" pitchFamily="34" charset="-122"/>
                 <a:cs typeface="Cambria" pitchFamily="34" charset="-120"/>
               </a:rPr>
-              <a:t>$9,000</a:t>
+              <a:t>Mixes it up</a:t>
             </a:r>
             <a:endParaRPr lang="en-US" sz="2400" dirty="0"/>
           </a:p>
@@ -7400,7 +7395,7 @@
                 <a:ea typeface="Calibri" pitchFamily="34" charset="-122"/>
                 <a:cs typeface="Calibri" pitchFamily="34" charset="-120"/>
               </a:rPr>
-              <a:t>Rival 2</a:t>
+              <a:t>Third place</a:t>
             </a:r>
             <a:endParaRPr lang="en-US" sz="1200" dirty="0"/>
           </a:p>
@@ -7439,7 +7434,7 @@
                 <a:ea typeface="Cambria" pitchFamily="34" charset="-122"/>
                 <a:cs typeface="Cambria" pitchFamily="34" charset="-120"/>
               </a:rPr>
-              <a:t>$10,000</a:t>
+              <a:t>No pattern</a:t>
             </a:r>
             <a:endParaRPr lang="en-US" sz="2400" dirty="0"/>
           </a:p>
@@ -7481,7 +7476,7 @@
                 <a:ea typeface="Calibri" pitchFamily="34" charset="-122"/>
                 <a:cs typeface="Calibri" pitchFamily="34" charset="-120"/>
               </a:rPr>
-              <a:t>At 100% self-confidence, the model finds you win exactly when both rivals bet big and get it wrong -- fully independent events.</a:t>
+              <a:t>Leaders usually bet to cover. Second place mixes all-in, keeping third place out, overtaking, and the small "two-thirds" bet. Third place bets with no pattern.</a:t>
             </a:r>
             <a:endParaRPr lang="en-US" sz="1400" dirty="0"/>
           </a:p>
@@ -7542,7 +7537,7 @@
                 <a:ea typeface="Cambria" pitchFamily="34" charset="-122"/>
                 <a:cs typeface="Cambria" pitchFamily="34" charset="-120"/>
               </a:rPr>
-              <a:t>1 in 12</a:t>
+              <a:t>Half</a:t>
             </a:r>
             <a:endParaRPr lang="en-US" sz="4800" dirty="0"/>
           </a:p>
@@ -7581,7 +7576,7 @@
                 <a:ea typeface="Calibri" pitchFamily="34" charset="-122"/>
                 <a:cs typeface="Calibri" pitchFamily="34" charset="-120"/>
               </a:rPr>
-              <a:t>~8.3% chance to win from 3rd place</a:t>
+              <a:t>Rivals are right half the time</a:t>
             </a:r>
             <a:endParaRPr lang="en-US" sz="1300" dirty="0"/>
           </a:p>
@@ -7595,8 +7590,8 @@
         </p:nvSpPr>
         <p:spPr>
           <a:xfrm>
-            <a:off x="3794760" y="5394960"/>
-            <a:ext cx="4572000" cy="411480"/>
+            <a:off x="3749040" y="5394960"/>
+            <a:ext cx="4663440" cy="411480"/>
           </a:xfrm>
           <a:prstGeom prst="rect">
             <a:avLst/>
@@ -7620,7 +7615,7 @@
                 <a:ea typeface="Calibri" pitchFamily="34" charset="-122"/>
                 <a:cs typeface="Calibri" pitchFamily="34" charset="-120"/>
               </a:rPr>
-              <a:t>matches the exact number the app showed -- verified by hand, not just by the code's own output</a:t>
+              <a:t>A hard clue is hard for everyone. Some weights are published (Tesauro et al., 2013); the rest are labeled assumptions.</a:t>
             </a:r>
             <a:endParaRPr lang="en-US" sz="1100" dirty="0"/>
           </a:p>

--- a/docs/deck.pptx
+++ b/docs/deck.pptx
@@ -2510,7 +2510,7 @@
                 <a:ea typeface="Calibri" pitchFamily="34" charset="-122"/>
                 <a:cs typeface="Calibri" pitchFamily="34" charset="-120"/>
               </a:rPr>
-              <a:t>How rivals bet -- based on IBM's study of real games; some weights published, the rest labeled assumptions</a:t>
+              <a:t>How rivals bet and answer -- matched to recent seasons; second place's mix still from IBM's older study</a:t>
             </a:r>
             <a:endParaRPr lang="en-US" sz="1300" dirty="0"/>
           </a:p>
@@ -7095,7 +7095,7 @@
                 <a:ea typeface="Cambria" pitchFamily="34" charset="-122"/>
                 <a:cs typeface="Cambria" pitchFamily="34" charset="-120"/>
               </a:rPr>
-              <a:t>Rivals that bet like real people</a:t>
+              <a:t>Rivals that play like today's contestants</a:t>
             </a:r>
             <a:endParaRPr lang="en-US" sz="3200" dirty="0"/>
           </a:p>
@@ -7134,7 +7134,7 @@
                 <a:ea typeface="Calibri" pitchFamily="34" charset="-122"/>
                 <a:cs typeface="Calibri" pitchFamily="34" charset="-120"/>
               </a:rPr>
-              <a:t>Smart Bet used to guess rivals' bets with an even split. Now it simulates contestants based on IBM's study of about 3,000 real games.</a:t>
+              <a:t>Smart Bet's rivals now play like contestants from recent seasons, not like the 1990s-2012 games in IBM's older study.</a:t>
             </a:r>
             <a:endParaRPr lang="en-US" sz="1400" dirty="0"/>
           </a:p>
@@ -7476,7 +7476,7 @@
                 <a:ea typeface="Calibri" pitchFamily="34" charset="-122"/>
                 <a:cs typeface="Calibri" pitchFamily="34" charset="-120"/>
               </a:rPr>
-              <a:t>Leaders usually bet to cover. Second place mixes all-in, keeping third place out, overtaking, and the small "two-thirds" bet. Third place bets with no pattern.</a:t>
+              <a:t>The leader almost always bets to cover second place. Second place mixes all-in, keeping third out, overtaking and the small "two-thirds" bet -- that mix still comes from IBM's older study. Third place bets with no pattern.</a:t>
             </a:r>
             <a:endParaRPr lang="en-US" sz="1400" dirty="0"/>
           </a:p>
@@ -7537,7 +7537,7 @@
                 <a:ea typeface="Cambria" pitchFamily="34" charset="-122"/>
                 <a:cs typeface="Cambria" pitchFamily="34" charset="-120"/>
               </a:rPr>
-              <a:t>Half</a:t>
+              <a:t>Modern</a:t>
             </a:r>
             <a:endParaRPr lang="en-US" sz="4800" dirty="0"/>
           </a:p>
@@ -7576,7 +7576,7 @@
                 <a:ea typeface="Calibri" pitchFamily="34" charset="-122"/>
                 <a:cs typeface="Calibri" pitchFamily="34" charset="-120"/>
               </a:rPr>
-              <a:t>Rivals are right half the time</a:t>
+              <a:t>Rivals play like recent seasons</a:t>
             </a:r>
             <a:endParaRPr lang="en-US" sz="1300" dirty="0"/>
           </a:p>
@@ -7615,7 +7615,7 @@
                 <a:ea typeface="Calibri" pitchFamily="34" charset="-122"/>
                 <a:cs typeface="Calibri" pitchFamily="34" charset="-120"/>
               </a:rPr>
-              <a:t>A hard clue is hard for everyone. Some weights are published (Tesauro et al., 2013); the rest are labeled assumptions.</a:t>
+              <a:t>They hunt Daily Doubles and bet them hard. Leaders are right more often. A hard clue is hard for everyone.</a:t>
             </a:r>
             <a:endParaRPr lang="en-US" sz="1100" dirty="0"/>
           </a:p>

--- a/docs/deck.pptx
+++ b/docs/deck.pptx
@@ -5495,7 +5495,7 @@
                 <a:ea typeface="Cambria" pitchFamily="34" charset="-122"/>
                 <a:cs typeface="Cambria" pitchFamily="34" charset="-120"/>
               </a:rPr>
-              <a:t>$6,001</a:t>
+              <a:t>$6,599</a:t>
             </a:r>
             <a:endParaRPr lang="en-US" sz="4400" dirty="0"/>
           </a:p>
@@ -5534,7 +5534,7 @@
                 <a:ea typeface="Calibri" pitchFamily="34" charset="-122"/>
                 <a:cs typeface="Calibri" pitchFamily="34" charset="-120"/>
               </a:rPr>
-              <a:t>new Smart Bet: one dollar more wins</a:t>
+              <a:t>new Smart Bet: wins outright, keeps a cushion</a:t>
             </a:r>
             <a:endParaRPr lang="en-US" sz="1400" dirty="0"/>
           </a:p>
@@ -5576,7 +5576,7 @@
                 <a:ea typeface="Calibri" pitchFamily="34" charset="-122"/>
                 <a:cs typeface="Calibri" pitchFamily="34" charset="-120"/>
               </a:rPr>
-              <a:t>Since November 2014, a tie for first goes</a:t>
+              <a:t>A tie now goes to a tiebreaker clue, so the</a:t>
             </a:r>
             <a:endParaRPr lang="en-US" sz="1150" dirty="0"/>
           </a:p>
@@ -5596,7 +5596,7 @@
                 <a:ea typeface="Calibri" pitchFamily="34" charset="-122"/>
                 <a:cs typeface="Calibri" pitchFamily="34" charset="-120"/>
               </a:rPr>
-              <a:t>to a tiebreaker clue, and only one player</a:t>
+              <a:t>tool bets enough to beat second place.</a:t>
             </a:r>
             <a:endParaRPr lang="en-US" sz="1150" dirty="0"/>
           </a:p>
@@ -5616,7 +5616,7 @@
                 <a:ea typeface="Calibri" pitchFamily="34" charset="-122"/>
                 <a:cs typeface="Calibri" pitchFamily="34" charset="-120"/>
               </a:rPr>
-              <a:t>comes back. The tool now follows that rule.</a:t>
+              <a:t>If you miss, your $3,401 stays above third's $3,400.</a:t>
             </a:r>
             <a:endParaRPr lang="en-US" sz="1150" dirty="0"/>
           </a:p>

--- a/docs/deck.pptx
+++ b/docs/deck.pptx
@@ -7134,7 +7134,7 @@
                 <a:ea typeface="Calibri" pitchFamily="34" charset="-122"/>
                 <a:cs typeface="Calibri" pitchFamily="34" charset="-120"/>
               </a:rPr>
-              <a:t>Smart Bet's rivals now play like contestants from recent seasons, not like the 1990s-2012 games in IBM's older study.</a:t>
+              <a:t>Smart Bet's rivals now play like contestants from recent seasons, not like the pre-2013 games in IBM's older study.</a:t>
             </a:r>
             <a:endParaRPr lang="en-US" sz="1400" dirty="0"/>
           </a:p>
@@ -7161,6 +7161,10 @@
           </a:solidFill>
           <a:ln/>
         </p:spPr>
+        <p:txBody>
+          <a:bodyPr/>
+          <a:p/>
+        </p:txBody>
       </p:sp>
       <p:sp>
         <p:nvSpPr>
@@ -7261,6 +7265,10 @@
           </a:solidFill>
           <a:ln/>
         </p:spPr>
+        <p:txBody>
+          <a:bodyPr/>
+          <a:p/>
+        </p:txBody>
       </p:sp>
       <p:sp>
         <p:nvSpPr>
@@ -7361,6 +7369,10 @@
           </a:solidFill>
           <a:ln/>
         </p:spPr>
+        <p:txBody>
+          <a:bodyPr/>
+          <a:p/>
+        </p:txBody>
       </p:sp>
       <p:sp>
         <p:nvSpPr>
@@ -7434,7 +7446,7 @@
                 <a:ea typeface="Cambria" pitchFamily="34" charset="-122"/>
                 <a:cs typeface="Cambria" pitchFamily="34" charset="-120"/>
               </a:rPr>
-              <a:t>No pattern</a:t>
+              <a:t>Ignores the scores</a:t>
             </a:r>
             <a:endParaRPr lang="en-US" sz="2400" dirty="0"/>
           </a:p>
@@ -7476,7 +7488,7 @@
                 <a:ea typeface="Calibri" pitchFamily="34" charset="-122"/>
                 <a:cs typeface="Calibri" pitchFamily="34" charset="-120"/>
               </a:rPr>
-              <a:t>The leader almost always bets to cover second place. Second place mixes all-in, keeping third out, overtaking and the small "two-thirds" bet -- that mix still comes from IBM's older study. Third place bets with no pattern.</a:t>
+              <a:t>The leader almost always bets to cover second place. Second place mixes all-in, keeping third out, overtaking and the small "two-thirds" bet -- that mix still comes from IBM's older study. Third place's bets don't track the scores.</a:t>
             </a:r>
             <a:endParaRPr lang="en-US" sz="1400" dirty="0"/>
           </a:p>
@@ -7503,6 +7515,10 @@
           </a:solidFill>
           <a:ln/>
         </p:spPr>
+        <p:txBody>
+          <a:bodyPr/>
+          <a:p/>
+        </p:txBody>
       </p:sp>
       <p:sp>
         <p:nvSpPr>
